--- a/slides/第03回_論理回路からプロセッサへ.pptx
+++ b/slides/第03回_論理回路からプロセッサへ.pptx
@@ -4486,7 +4486,7 @@
         <p:spPr>
           <a:xfrm>
             <a:off x="685800" y="1481328"/>
-            <a:ext cx="10789920" cy="621792"/>
+            <a:ext cx="10789920" cy="365760"/>
           </a:xfrm>
           <a:prstGeom prst="rect">
             <a:avLst/>
@@ -4527,7 +4527,7 @@
         </p:nvSpPr>
         <p:spPr>
           <a:xfrm>
-            <a:off x="685800" y="2139696"/>
+            <a:off x="685800" y="1883664"/>
             <a:ext cx="3444240" cy="1463040"/>
           </a:xfrm>
           <a:prstGeom prst="roundRect">
@@ -4554,7 +4554,7 @@
         </p:nvSpPr>
         <p:spPr>
           <a:xfrm>
-            <a:off x="868680" y="2276856"/>
+            <a:off x="868680" y="2020824"/>
             <a:ext cx="3078480" cy="310896"/>
           </a:xfrm>
           <a:prstGeom prst="rect">
@@ -4593,7 +4593,7 @@
         </p:nvSpPr>
         <p:spPr>
           <a:xfrm>
-            <a:off x="868680" y="2624328"/>
+            <a:off x="868680" y="2368296"/>
             <a:ext cx="3078480" cy="822960"/>
           </a:xfrm>
           <a:prstGeom prst="rect">
@@ -4635,7 +4635,7 @@
         </p:nvSpPr>
         <p:spPr>
           <a:xfrm>
-            <a:off x="4358640" y="2139696"/>
+            <a:off x="4358640" y="1883664"/>
             <a:ext cx="3444240" cy="1463040"/>
           </a:xfrm>
           <a:prstGeom prst="roundRect">
@@ -4662,7 +4662,7 @@
         </p:nvSpPr>
         <p:spPr>
           <a:xfrm>
-            <a:off x="4541520" y="2276856"/>
+            <a:off x="4541520" y="2020824"/>
             <a:ext cx="3078480" cy="310896"/>
           </a:xfrm>
           <a:prstGeom prst="rect">
@@ -4701,7 +4701,7 @@
         </p:nvSpPr>
         <p:spPr>
           <a:xfrm>
-            <a:off x="4541520" y="2624328"/>
+            <a:off x="4541520" y="2368296"/>
             <a:ext cx="3078480" cy="822960"/>
           </a:xfrm>
           <a:prstGeom prst="rect">
@@ -4743,7 +4743,7 @@
         </p:nvSpPr>
         <p:spPr>
           <a:xfrm>
-            <a:off x="8031480" y="2139696"/>
+            <a:off x="8031480" y="1883664"/>
             <a:ext cx="3444240" cy="1463040"/>
           </a:xfrm>
           <a:prstGeom prst="roundRect">
@@ -4770,7 +4770,7 @@
         </p:nvSpPr>
         <p:spPr>
           <a:xfrm>
-            <a:off x="8214360" y="2276856"/>
+            <a:off x="8214360" y="2020824"/>
             <a:ext cx="3078480" cy="310896"/>
           </a:xfrm>
           <a:prstGeom prst="rect">
@@ -4809,7 +4809,7 @@
         </p:nvSpPr>
         <p:spPr>
           <a:xfrm>
-            <a:off x="8214360" y="2624328"/>
+            <a:off x="8214360" y="2368296"/>
             <a:ext cx="3078480" cy="822960"/>
           </a:xfrm>
           <a:prstGeom prst="rect">
@@ -5956,45 +5956,6 @@
       <p:sp>
         <p:nvSpPr>
           <p:cNvPr id="6" name="Text 3"/>
-          <p:cNvSpPr/>
-          <p:nvPr/>
-        </p:nvSpPr>
-        <p:spPr>
-          <a:xfrm>
-            <a:off x="685800" y="5687568"/>
-            <a:ext cx="10789920" cy="365760"/>
-          </a:xfrm>
-          <a:prstGeom prst="rect">
-            <a:avLst/>
-          </a:prstGeom>
-          <a:noFill/>
-          <a:ln/>
-        </p:spPr>
-        <p:txBody>
-          <a:bodyPr wrap="square" lIns="0" tIns="0" rIns="0" bIns="0" rtlCol="0" anchor="ctr"/>
-          <a:lstStyle/>
-          <a:p>
-            <a:pPr algn="ctr" indent="0" marL="0">
-              <a:buNone/>
-            </a:pPr>
-            <a:r>
-              <a:rPr lang="en-US" sz="1500" dirty="0">
-                <a:solidFill>
-                  <a:srgbClr val="16191D"/>
-                </a:solidFill>
-                <a:latin typeface="Yu Gothic" pitchFamily="34" charset="0"/>
-                <a:ea typeface="Yu Gothic" pitchFamily="34" charset="-122"/>
-                <a:cs typeface="Yu Gothic" pitchFamily="34" charset="-120"/>
-              </a:rPr>
-              <a:t>命令とデータを区別せず、同じ番地空間に置く。第1回の万能チューリングマシンの実装形である。</a:t>
-            </a:r>
-            <a:endParaRPr lang="en-US" sz="1500" dirty="0"/>
-          </a:p>
-        </p:txBody>
-      </p:sp>
-      <p:sp>
-        <p:nvSpPr>
-          <p:cNvPr id="7" name="Text 4"/>
           <p:cNvSpPr/>
           <p:nvPr/>
         </p:nvSpPr>
@@ -14030,7 +13991,7 @@
         <p:spPr>
           <a:xfrm>
             <a:off x="685800" y="1481328"/>
-            <a:ext cx="10789920" cy="621792"/>
+            <a:ext cx="10789920" cy="566928"/>
           </a:xfrm>
           <a:prstGeom prst="rect">
             <a:avLst/>
@@ -14071,7 +14032,7 @@
         </p:nvSpPr>
         <p:spPr>
           <a:xfrm>
-            <a:off x="685800" y="2139696"/>
+            <a:off x="685800" y="2084832"/>
             <a:ext cx="3444240" cy="1554480"/>
           </a:xfrm>
           <a:prstGeom prst="roundRect">
@@ -14098,7 +14059,7 @@
         </p:nvSpPr>
         <p:spPr>
           <a:xfrm>
-            <a:off x="868680" y="2276856"/>
+            <a:off x="868680" y="2221992"/>
             <a:ext cx="3078480" cy="310896"/>
           </a:xfrm>
           <a:prstGeom prst="rect">
@@ -14137,7 +14098,7 @@
         </p:nvSpPr>
         <p:spPr>
           <a:xfrm>
-            <a:off x="868680" y="2624328"/>
+            <a:off x="868680" y="2569464"/>
             <a:ext cx="3078480" cy="914400"/>
           </a:xfrm>
           <a:prstGeom prst="rect">
@@ -14179,7 +14140,7 @@
         </p:nvSpPr>
         <p:spPr>
           <a:xfrm>
-            <a:off x="4358640" y="2139696"/>
+            <a:off x="4358640" y="2084832"/>
             <a:ext cx="3444240" cy="1554480"/>
           </a:xfrm>
           <a:prstGeom prst="roundRect">
@@ -14206,7 +14167,7 @@
         </p:nvSpPr>
         <p:spPr>
           <a:xfrm>
-            <a:off x="4541520" y="2276856"/>
+            <a:off x="4541520" y="2221992"/>
             <a:ext cx="3078480" cy="310896"/>
           </a:xfrm>
           <a:prstGeom prst="rect">
@@ -14245,7 +14206,7 @@
         </p:nvSpPr>
         <p:spPr>
           <a:xfrm>
-            <a:off x="4541520" y="2624328"/>
+            <a:off x="4541520" y="2569464"/>
             <a:ext cx="3078480" cy="914400"/>
           </a:xfrm>
           <a:prstGeom prst="rect">
@@ -14287,7 +14248,7 @@
         </p:nvSpPr>
         <p:spPr>
           <a:xfrm>
-            <a:off x="8031480" y="2139696"/>
+            <a:off x="8031480" y="2084832"/>
             <a:ext cx="3444240" cy="1554480"/>
           </a:xfrm>
           <a:prstGeom prst="roundRect">
@@ -14314,7 +14275,7 @@
         </p:nvSpPr>
         <p:spPr>
           <a:xfrm>
-            <a:off x="8214360" y="2276856"/>
+            <a:off x="8214360" y="2221992"/>
             <a:ext cx="3078480" cy="310896"/>
           </a:xfrm>
           <a:prstGeom prst="rect">
@@ -14353,7 +14314,7 @@
         </p:nvSpPr>
         <p:spPr>
           <a:xfrm>
-            <a:off x="8214360" y="2624328"/>
+            <a:off x="8214360" y="2569464"/>
             <a:ext cx="3078480" cy="914400"/>
           </a:xfrm>
           <a:prstGeom prst="rect">
@@ -17450,45 +17411,6 @@
           </a:prstGeom>
         </p:spPr>
       </p:pic>
-      <p:sp>
-        <p:nvSpPr>
-          <p:cNvPr id="7" name="Text 4"/>
-          <p:cNvSpPr/>
-          <p:nvPr/>
-        </p:nvSpPr>
-        <p:spPr>
-          <a:xfrm>
-            <a:off x="685800" y="5687568"/>
-            <a:ext cx="10789920" cy="365760"/>
-          </a:xfrm>
-          <a:prstGeom prst="rect">
-            <a:avLst/>
-          </a:prstGeom>
-          <a:noFill/>
-          <a:ln/>
-        </p:spPr>
-        <p:txBody>
-          <a:bodyPr wrap="square" lIns="0" tIns="0" rIns="0" bIns="0" rtlCol="0" anchor="ctr"/>
-          <a:lstStyle/>
-          <a:p>
-            <a:pPr algn="ctr" indent="0" marL="0">
-              <a:buNone/>
-            </a:pPr>
-            <a:r>
-              <a:rPr lang="en-US" sz="1500" dirty="0">
-                <a:solidFill>
-                  <a:srgbClr val="16191D"/>
-                </a:solidFill>
-                <a:latin typeface="Yu Gothic" pitchFamily="34" charset="0"/>
-                <a:ea typeface="Yu Gothic" pitchFamily="34" charset="-122"/>
-                <a:cs typeface="Yu Gothic" pitchFamily="34" charset="-120"/>
-              </a:rPr>
-              <a:t>出力側の小円が「否定」を表す。AND に付けると NAND になる。</a:t>
-            </a:r>
-            <a:endParaRPr lang="en-US" sz="1500" dirty="0"/>
-          </a:p>
-        </p:txBody>
-      </p:sp>
     </p:spTree>
   </p:cSld>
   <p:clrMapOvr>
@@ -17647,7 +17569,7 @@
         <p:spPr>
           <a:xfrm>
             <a:off x="685800" y="1481328"/>
-            <a:ext cx="10789920" cy="621792"/>
+            <a:ext cx="10789920" cy="365760"/>
           </a:xfrm>
           <a:prstGeom prst="rect">
             <a:avLst/>
@@ -17696,8 +17618,8 @@
         </p:blipFill>
         <p:spPr>
           <a:xfrm>
-            <a:off x="2734056" y="2139696"/>
-            <a:ext cx="6693408" cy="3346704"/>
+            <a:off x="2478024" y="1883664"/>
+            <a:ext cx="7205472" cy="3602736"/>
           </a:xfrm>
           <a:prstGeom prst="rect">
             <a:avLst/>

--- a/slides/第03回_論理回路からプロセッサへ.pptx
+++ b/slides/第03回_論理回路からプロセッサへ.pptx
@@ -14815,7 +14815,7 @@
                 <a:ea typeface="Courier New" pitchFamily="34" charset="-122"/>
                 <a:cs typeface="Courier New" pitchFamily="34" charset="-120"/>
               </a:rPr>
-              <a:t>3-3</a:t>
+              <a:t>3-4</a:t>
             </a:r>
             <a:endParaRPr lang="en-US" sz="1300" dirty="0"/>
           </a:p>
@@ -14923,7 +14923,7 @@
                 <a:ea typeface="Courier New" pitchFamily="34" charset="-122"/>
                 <a:cs typeface="Courier New" pitchFamily="34" charset="-120"/>
               </a:rPr>
-              <a:t>3-4</a:t>
+              <a:t>3-6</a:t>
             </a:r>
             <a:endParaRPr lang="en-US" sz="1300" dirty="0"/>
           </a:p>

--- a/slides/第03回_論理回路からプロセッサへ.pptx
+++ b/slides/第03回_論理回路からプロセッサへ.pptx
@@ -14857,7 +14857,7 @@
                 <a:ea typeface="Yu Gothic" pitchFamily="34" charset="-122"/>
                 <a:cs typeface="Yu Gothic" pitchFamily="34" charset="-120"/>
               </a:rPr>
-              <a:t>クロック周波数 3GHz のプロセッサの1周期は何秒か。その間に光が進む距離を求めよ（光速 3×10⁸ m/s）。</a:t>
+              <a:t>配線中の信号は光速の約6割（1.8×10⁸ m/s）で進む。(a) 5GHz の1周期で信号が進む距離は何 mm か。(b) 一辺20mm のチップの対角（約28mm）に1周期で届くか。(c) 届かなくなるのは何 GHz を超えたときか。</a:t>
             </a:r>
             <a:endParaRPr lang="en-US" sz="1400" dirty="0"/>
           </a:p>

--- a/slides/第03回_論理回路からプロセッサへ.pptx
+++ b/slides/第03回_論理回路からプロセッサへ.pptx
@@ -14749,7 +14749,7 @@
                 <a:ea typeface="Yu Gothic" pitchFamily="34" charset="-122"/>
                 <a:cs typeface="Yu Gothic" pitchFamily="34" charset="-120"/>
               </a:rPr>
-              <a:t>4ビット加算器で 0110 + 1011 を計算せよ。各段の Cin, S, Cout を表にして示せ。結果は4ビットに収まるか。</a:t>
+              <a:t>4ビット加算器で 0110 + 1011 を計算せよ。各段の Cin, S, Cout を（1行1段で）示せ。結果は4ビットに収まるか。</a:t>
             </a:r>
             <a:endParaRPr lang="en-US" sz="1400" dirty="0"/>
           </a:p>
